--- a/media/resources/files/Onduktar_ARALASH_AMALDAR_BINGO_WkN5faA.pptx
+++ b/media/resources/files/Onduktar_ARALASH_AMALDAR_BINGO_WkN5faA.pptx
@@ -18369,7 +18369,7 @@
                 <a:ea typeface="+mn-ea"/>
                 <a:cs typeface="+mn-cs"/>
               </a:rPr>
-              <a:t>Турдуу пикирлер учун ыраазычылык билдиребиз.</a:t>
+              <a:t>Түрдүү пикирлер үчүн ыраазычылык билдиребиз.</a:t>
             </a:r>
           </a:p>
           <a:p>

--- a/media/resources/files/Onduktar_ARALASH_AMALDAR_BINGO_WkN5faA.pptx
+++ b/media/resources/files/Onduktar_ARALASH_AMALDAR_BINGO_WkN5faA.pptx
@@ -3554,7 +3554,7 @@
                 <a:ea typeface="+mn-ea"/>
                 <a:cs typeface="+mn-cs"/>
               </a:rPr>
-              <a:t>Окуучулар </a:t>
+              <a:t>Окуучулар тордон тогуз жоопту тандап, дептердеги 3х3 чакмакка каалагандай коюшат.</a:t>
             </a:r>
             <a:r>
               <a:rPr kumimoji="0" lang="ru-RU" sz="2400" b="0" i="0" u="none" strike="noStrike" kern="1200" cap="none" spc="0" normalizeH="0" baseline="0" noProof="0" dirty="0">
@@ -3571,7 +3571,7 @@
                 <a:ea typeface="+mn-ea"/>
                 <a:cs typeface="+mn-cs"/>
               </a:rPr>
-              <a:t>суроо</a:t>
+              <a:t/>
             </a:r>
             <a:r>
               <a:rPr kumimoji="0" lang="en-US" sz="2400" b="0" i="0" u="none" strike="noStrike" kern="1200" cap="none" spc="0" normalizeH="0" baseline="0" noProof="0" dirty="0">
@@ -3588,7 +3588,7 @@
                 <a:ea typeface="+mn-ea"/>
                 <a:cs typeface="+mn-cs"/>
               </a:rPr>
-              <a:t> </a:t>
+              <a:t/>
             </a:r>
             <a:r>
               <a:rPr kumimoji="0" lang="en-US" sz="2400" b="0" i="0" u="none" strike="noStrike" kern="1200" cap="none" spc="0" normalizeH="0" baseline="0" noProof="0" dirty="0" err="1">
@@ -3605,7 +3605,7 @@
                 <a:ea typeface="+mn-ea"/>
                 <a:cs typeface="+mn-cs"/>
               </a:rPr>
-              <a:t>тордон</a:t>
+              <a:t/>
             </a:r>
             <a:r>
               <a:rPr kumimoji="0" lang="en-US" sz="2400" b="0" i="0" u="none" strike="noStrike" kern="1200" cap="none" spc="0" normalizeH="0" baseline="0" noProof="0" dirty="0">
@@ -3622,7 +3622,7 @@
                 <a:ea typeface="+mn-ea"/>
                 <a:cs typeface="+mn-cs"/>
               </a:rPr>
-              <a:t> </a:t>
+              <a:t/>
             </a:r>
             <a:r>
               <a:rPr kumimoji="0" lang="en-US" sz="2000" b="0" i="0" u="none" strike="noStrike" kern="1200" cap="none" spc="0" normalizeH="0" baseline="0" noProof="0" dirty="0" err="1">
@@ -3639,7 +3639,7 @@
                 <a:ea typeface="+mn-ea"/>
                 <a:cs typeface="+mn-cs"/>
               </a:rPr>
-              <a:t>тогуз</a:t>
+              <a:t/>
             </a:r>
             <a:r>
               <a:rPr kumimoji="0" lang="en-US" sz="2000" b="0" i="0" u="none" strike="noStrike" kern="1200" cap="none" spc="0" normalizeH="0" baseline="0" noProof="0" dirty="0">
@@ -3656,7 +3656,7 @@
                 <a:ea typeface="+mn-ea"/>
                 <a:cs typeface="+mn-cs"/>
               </a:rPr>
-              <a:t> </a:t>
+              <a:t/>
             </a:r>
             <a:r>
               <a:rPr kumimoji="0" lang="en-US" sz="2000" b="0" i="0" u="none" strike="noStrike" kern="1200" cap="none" spc="0" normalizeH="0" baseline="0" noProof="0" dirty="0" err="1">
@@ -3673,7 +3673,7 @@
                 <a:ea typeface="+mn-ea"/>
                 <a:cs typeface="+mn-cs"/>
               </a:rPr>
-              <a:t>жоопту</a:t>
+              <a:t/>
             </a:r>
             <a:r>
               <a:rPr kumimoji="0" lang="en-US" sz="2000" b="0" i="0" u="none" strike="noStrike" kern="1200" cap="none" spc="0" normalizeH="0" baseline="0" noProof="0" dirty="0">
@@ -3690,7 +3690,7 @@
                 <a:ea typeface="+mn-ea"/>
                 <a:cs typeface="+mn-cs"/>
               </a:rPr>
-              <a:t> </a:t>
+              <a:t/>
             </a:r>
             <a:r>
               <a:rPr kumimoji="0" lang="en-US" sz="2000" b="0" i="0" u="none" strike="noStrike" kern="1200" cap="none" spc="0" normalizeH="0" baseline="0" noProof="0" dirty="0" err="1">
@@ -3707,7 +3707,7 @@
                 <a:ea typeface="+mn-ea"/>
                 <a:cs typeface="+mn-cs"/>
               </a:rPr>
-              <a:t>тандап</a:t>
+              <a:t/>
             </a:r>
             <a:r>
               <a:rPr kumimoji="0" lang="en-US" sz="2000" b="0" i="0" u="none" strike="noStrike" kern="1200" cap="none" spc="0" normalizeH="0" baseline="0" noProof="0" dirty="0">
@@ -3724,7 +3724,7 @@
                 <a:ea typeface="+mn-ea"/>
                 <a:cs typeface="+mn-cs"/>
               </a:rPr>
-              <a:t>, </a:t>
+              <a:t/>
             </a:r>
             <a:r>
               <a:rPr kumimoji="0" lang="en-US" sz="2000" b="0" i="0" u="none" strike="noStrike" kern="1200" cap="none" spc="0" normalizeH="0" baseline="0" noProof="0" dirty="0" err="1">
@@ -3741,7 +3741,7 @@
                 <a:ea typeface="+mn-ea"/>
                 <a:cs typeface="+mn-cs"/>
               </a:rPr>
-              <a:t>аларды</a:t>
+              <a:t/>
             </a:r>
             <a:r>
               <a:rPr kumimoji="0" lang="en-US" sz="2000" b="0" i="0" u="none" strike="noStrike" kern="1200" cap="none" spc="0" normalizeH="0" baseline="0" noProof="0" dirty="0">
@@ -3758,7 +3758,7 @@
                 <a:ea typeface="+mn-ea"/>
                 <a:cs typeface="+mn-cs"/>
               </a:rPr>
-              <a:t> </a:t>
+              <a:t/>
             </a:r>
             <a:r>
               <a:rPr kumimoji="0" lang="ru-RU" sz="2000" b="0" i="0" u="none" strike="noStrike" kern="1200" cap="none" spc="0" normalizeH="0" baseline="0" noProof="0" dirty="0">
@@ -3775,7 +3775,7 @@
                 <a:ea typeface="+mn-ea"/>
                 <a:cs typeface="+mn-cs"/>
               </a:rPr>
-              <a:t>дептериндеги</a:t>
+              <a:t/>
             </a:r>
             <a:r>
               <a:rPr kumimoji="0" lang="en-US" sz="2000" b="0" i="0" u="none" strike="noStrike" kern="1200" cap="none" spc="0" normalizeH="0" baseline="0" noProof="0" dirty="0">
@@ -3792,7 +3792,7 @@
                 <a:ea typeface="+mn-ea"/>
                 <a:cs typeface="+mn-cs"/>
               </a:rPr>
-              <a:t> 3х3 </a:t>
+              <a:t/>
             </a:r>
             <a:r>
               <a:rPr kumimoji="0" lang="en-US" sz="2000" b="0" i="0" u="none" strike="noStrike" kern="1200" cap="none" spc="0" normalizeH="0" baseline="0" noProof="0" dirty="0" err="1">
@@ -3809,7 +3809,7 @@
                 <a:ea typeface="+mn-ea"/>
                 <a:cs typeface="+mn-cs"/>
               </a:rPr>
-              <a:t>квадратка</a:t>
+              <a:t/>
             </a:r>
             <a:r>
               <a:rPr kumimoji="0" lang="en-US" sz="2000" b="0" i="0" u="none" strike="noStrike" kern="1200" cap="none" spc="0" normalizeH="0" baseline="0" noProof="0" dirty="0">
@@ -3826,7 +3826,7 @@
                 <a:ea typeface="+mn-ea"/>
                 <a:cs typeface="+mn-cs"/>
               </a:rPr>
-              <a:t> </a:t>
+              <a:t/>
             </a:r>
             <a:r>
               <a:rPr kumimoji="0" lang="en-US" sz="2000" b="0" i="0" u="none" strike="noStrike" kern="1200" cap="none" spc="0" normalizeH="0" baseline="0" noProof="0" dirty="0" err="1">
@@ -3843,7 +3843,7 @@
                 <a:ea typeface="+mn-ea"/>
                 <a:cs typeface="+mn-cs"/>
               </a:rPr>
-              <a:t>туш</a:t>
+              <a:t/>
             </a:r>
             <a:r>
               <a:rPr kumimoji="0" lang="en-US" sz="2000" b="0" i="0" u="none" strike="noStrike" kern="1200" cap="none" spc="0" normalizeH="0" baseline="0" noProof="0" dirty="0">
@@ -3860,7 +3860,7 @@
                 <a:ea typeface="+mn-ea"/>
                 <a:cs typeface="+mn-cs"/>
               </a:rPr>
-              <a:t> </a:t>
+              <a:t/>
             </a:r>
             <a:r>
               <a:rPr kumimoji="0" lang="en-US" sz="2000" b="0" i="0" u="none" strike="noStrike" kern="1200" cap="none" spc="0" normalizeH="0" baseline="0" noProof="0" dirty="0" err="1">
@@ -3877,7 +3877,7 @@
                 <a:ea typeface="+mn-ea"/>
                 <a:cs typeface="+mn-cs"/>
               </a:rPr>
-              <a:t>келди</a:t>
+              <a:t/>
             </a:r>
             <a:r>
               <a:rPr kumimoji="0" lang="en-US" sz="2000" b="0" i="0" u="none" strike="noStrike" kern="1200" cap="none" spc="0" normalizeH="0" baseline="0" noProof="0" dirty="0">
@@ -3894,7 +3894,7 @@
                 <a:ea typeface="+mn-ea"/>
                 <a:cs typeface="+mn-cs"/>
               </a:rPr>
-              <a:t> </a:t>
+              <a:t/>
             </a:r>
             <a:r>
               <a:rPr kumimoji="0" lang="en-US" sz="2000" b="0" i="0" u="none" strike="noStrike" kern="1200" cap="none" spc="0" normalizeH="0" baseline="0" noProof="0" dirty="0" err="1">
@@ -3911,7 +3911,7 @@
                 <a:ea typeface="+mn-ea"/>
                 <a:cs typeface="+mn-cs"/>
               </a:rPr>
-              <a:t>жайгаштырышы</a:t>
+              <a:t/>
             </a:r>
             <a:r>
               <a:rPr kumimoji="0" lang="en-US" sz="2000" b="0" i="0" u="none" strike="noStrike" kern="1200" cap="none" spc="0" normalizeH="0" baseline="0" noProof="0" dirty="0">
@@ -3928,7 +3928,7 @@
                 <a:ea typeface="+mn-ea"/>
                 <a:cs typeface="+mn-cs"/>
               </a:rPr>
-              <a:t> </a:t>
+              <a:t/>
             </a:r>
             <a:r>
               <a:rPr kumimoji="0" lang="en-US" sz="2000" b="0" i="0" u="none" strike="noStrike" kern="1200" cap="none" spc="0" normalizeH="0" baseline="0" noProof="0" dirty="0" err="1">
@@ -3945,7 +3945,7 @@
                 <a:ea typeface="+mn-ea"/>
                 <a:cs typeface="+mn-cs"/>
               </a:rPr>
-              <a:t>керек</a:t>
+              <a:t/>
             </a:r>
             <a:r>
               <a:rPr kumimoji="0" lang="en-US" sz="2000" b="0" i="0" u="none" strike="noStrike" kern="1200" cap="none" spc="0" normalizeH="0" baseline="0" noProof="0" dirty="0">
@@ -3962,7 +3962,7 @@
                 <a:ea typeface="+mn-ea"/>
                 <a:cs typeface="+mn-cs"/>
               </a:rPr>
-              <a:t>.</a:t>
+              <a:t/>
             </a:r>
           </a:p>
           <a:p>
@@ -5283,7 +5283,7 @@
             <a:pPr algn="ctr"/>
             <a:r>
               <a:rPr lang="en-GB" sz="8800" dirty="0"/>
-              <a:t>3 ÷ 0.5</a:t>
+              <a:t>3 ÷ 0,5</a:t>
             </a:r>
           </a:p>
         </p:txBody>
@@ -5607,7 +5607,7 @@
             <a:pPr algn="ctr"/>
             <a:r>
               <a:rPr lang="en-GB" sz="8800" dirty="0"/>
-              <a:t>2.8 ÷ 1.4</a:t>
+              <a:t>2,8 ÷ 1,4</a:t>
             </a:r>
           </a:p>
         </p:txBody>
@@ -5895,7 +5895,7 @@
                   <a:schemeClr val="tx1"/>
                 </a:solidFill>
               </a:rPr>
-              <a:t>6.5</a:t>
+              <a:t>6,5</a:t>
             </a:r>
           </a:p>
         </p:txBody>
@@ -5931,7 +5931,7 @@
             <a:pPr algn="ctr"/>
             <a:r>
               <a:rPr lang="en-GB" sz="8800" dirty="0"/>
-              <a:t>0.9 + 5.6</a:t>
+              <a:t>0,9 + 5,6</a:t>
             </a:r>
           </a:p>
         </p:txBody>
@@ -6219,7 +6219,7 @@
                   <a:schemeClr val="tx1"/>
                 </a:solidFill>
               </a:rPr>
-              <a:t>2.1</a:t>
+              <a:t>2,1</a:t>
             </a:r>
           </a:p>
         </p:txBody>
@@ -6255,7 +6255,7 @@
             <a:pPr algn="ctr"/>
             <a:r>
               <a:rPr lang="en-GB" sz="8800" dirty="0"/>
-              <a:t>4.8 − 2.7</a:t>
+              <a:t>4,8 − 2,7</a:t>
             </a:r>
           </a:p>
         </p:txBody>
@@ -6543,7 +6543,7 @@
                   <a:schemeClr val="tx1"/>
                 </a:solidFill>
               </a:rPr>
-              <a:t>6.4</a:t>
+              <a:t>6,4</a:t>
             </a:r>
           </a:p>
         </p:txBody>
@@ -6579,7 +6579,7 @@
             <a:pPr algn="ctr"/>
             <a:r>
               <a:rPr lang="en-GB" sz="8800" dirty="0"/>
-              <a:t>2.8 + 3.6</a:t>
+              <a:t>2,8 + 3,6</a:t>
             </a:r>
           </a:p>
         </p:txBody>
@@ -6867,7 +6867,7 @@
                   <a:schemeClr val="tx1"/>
                 </a:solidFill>
               </a:rPr>
-              <a:t>8.4</a:t>
+              <a:t>8,4</a:t>
             </a:r>
           </a:p>
         </p:txBody>
@@ -6903,7 +6903,7 @@
             <a:pPr algn="ctr"/>
             <a:r>
               <a:rPr lang="en-GB" sz="8800" dirty="0"/>
-              <a:t>1.2 × 7</a:t>
+              <a:t>1,2 × 7</a:t>
             </a:r>
           </a:p>
         </p:txBody>
@@ -7191,7 +7191,7 @@
                   <a:schemeClr val="tx1"/>
                 </a:solidFill>
               </a:rPr>
-              <a:t>0.8</a:t>
+              <a:t>0,8</a:t>
             </a:r>
           </a:p>
         </p:txBody>
@@ -7227,7 +7227,7 @@
             <a:pPr algn="ctr"/>
             <a:r>
               <a:rPr lang="en-GB" sz="8800" dirty="0"/>
-              <a:t>4.5 − 3.7</a:t>
+              <a:t>4,5 − 3,7</a:t>
             </a:r>
           </a:p>
         </p:txBody>
@@ -7551,7 +7551,7 @@
             <a:pPr algn="ctr"/>
             <a:r>
               <a:rPr lang="en-GB" sz="8800" dirty="0"/>
-              <a:t>1.5 ÷ 0.5</a:t>
+              <a:t>1,5 ÷ 0,5</a:t>
             </a:r>
           </a:p>
         </p:txBody>
@@ -7839,7 +7839,7 @@
                   <a:schemeClr val="tx1"/>
                 </a:solidFill>
               </a:rPr>
-              <a:t>0.42</a:t>
+              <a:t>0,42</a:t>
             </a:r>
           </a:p>
         </p:txBody>
@@ -7875,7 +7875,7 @@
             <a:pPr algn="ctr"/>
             <a:r>
               <a:rPr lang="en-GB" sz="8800" dirty="0"/>
-              <a:t>1.4 × 0.3</a:t>
+              <a:t>1,4 × 0,3</a:t>
             </a:r>
           </a:p>
         </p:txBody>
@@ -8163,7 +8163,7 @@
                   <a:schemeClr val="tx1"/>
                 </a:solidFill>
               </a:rPr>
-              <a:t>1.98</a:t>
+              <a:t>1,98</a:t>
             </a:r>
           </a:p>
         </p:txBody>
@@ -8199,7 +8199,7 @@
             <a:pPr algn="ctr"/>
             <a:r>
               <a:rPr lang="en-GB" sz="8800" dirty="0"/>
-              <a:t>1.1 × 1.8</a:t>
+              <a:t>1,1 × 1,8</a:t>
             </a:r>
           </a:p>
         </p:txBody>
@@ -18744,7 +18744,7 @@
                           <a:ea typeface="+mn-ea"/>
                           <a:cs typeface="+mn-cs"/>
                         </a:rPr>
-                        <a:t>0.8</a:t>
+                        <a:t>0,8</a:t>
                       </a:r>
                     </a:p>
                   </a:txBody>
@@ -18827,7 +18827,7 @@
                           <a:ea typeface="+mn-ea"/>
                           <a:cs typeface="+mn-cs"/>
                         </a:rPr>
-                        <a:t>2.1</a:t>
+                        <a:t>2,1</a:t>
                       </a:r>
                     </a:p>
                   </a:txBody>
@@ -18910,7 +18910,7 @@
                           <a:ea typeface="+mn-ea"/>
                           <a:cs typeface="+mn-cs"/>
                         </a:rPr>
-                        <a:t>3.9 </a:t>
+                        <a:t>3,9 </a:t>
                       </a:r>
                     </a:p>
                   </a:txBody>
@@ -19000,7 +19000,7 @@
                           <a:ea typeface="+mn-ea"/>
                           <a:cs typeface="+mn-cs"/>
                         </a:rPr>
-                        <a:t>6.5</a:t>
+                        <a:t>6,5</a:t>
                       </a:r>
                     </a:p>
                   </a:txBody>
@@ -19083,7 +19083,7 @@
                           <a:ea typeface="+mn-ea"/>
                           <a:cs typeface="+mn-cs"/>
                         </a:rPr>
-                        <a:t>0.42</a:t>
+                        <a:t>0,42</a:t>
                       </a:r>
                     </a:p>
                   </a:txBody>
@@ -19166,7 +19166,7 @@
                           <a:ea typeface="+mn-ea"/>
                           <a:cs typeface="+mn-cs"/>
                         </a:rPr>
-                        <a:t>0.9</a:t>
+                        <a:t>0,9</a:t>
                       </a:r>
                     </a:p>
                   </a:txBody>
@@ -19249,7 +19249,7 @@
                           <a:ea typeface="+mn-ea"/>
                           <a:cs typeface="+mn-cs"/>
                         </a:rPr>
-                        <a:t>8.4</a:t>
+                        <a:t>8,4</a:t>
                       </a:r>
                     </a:p>
                   </a:txBody>
@@ -19339,7 +19339,7 @@
                           <a:ea typeface="+mn-ea"/>
                           <a:cs typeface="+mn-cs"/>
                         </a:rPr>
-                        <a:t>1.9</a:t>
+                        <a:t>1,9</a:t>
                       </a:r>
                     </a:p>
                   </a:txBody>
@@ -19422,7 +19422,7 @@
                           <a:ea typeface="+mn-ea"/>
                           <a:cs typeface="+mn-cs"/>
                         </a:rPr>
-                        <a:t>2.4</a:t>
+                        <a:t>2,4</a:t>
                       </a:r>
                     </a:p>
                   </a:txBody>
@@ -19588,7 +19588,7 @@
                           <a:ea typeface="+mn-ea"/>
                           <a:cs typeface="+mn-cs"/>
                         </a:rPr>
-                        <a:t>1.98</a:t>
+                        <a:t>1,98</a:t>
                       </a:r>
                     </a:p>
                   </a:txBody>
@@ -19761,7 +19761,7 @@
                           <a:ea typeface="+mn-ea"/>
                           <a:cs typeface="+mn-cs"/>
                         </a:rPr>
-                        <a:t>3.5</a:t>
+                        <a:t>3,5</a:t>
                       </a:r>
                     </a:p>
                   </a:txBody>
@@ -19844,7 +19844,7 @@
                           <a:ea typeface="+mn-ea"/>
                           <a:cs typeface="+mn-cs"/>
                         </a:rPr>
-                        <a:t>2.8</a:t>
+                        <a:t>2,8</a:t>
                       </a:r>
                     </a:p>
                   </a:txBody>
@@ -19927,7 +19927,7 @@
                           <a:ea typeface="+mn-ea"/>
                           <a:cs typeface="+mn-cs"/>
                         </a:rPr>
-                        <a:t>6.4</a:t>
+                        <a:t>6,4</a:t>
                       </a:r>
                     </a:p>
                   </a:txBody>
@@ -21024,7 +21024,7 @@
                   <a:schemeClr val="tx1"/>
                 </a:solidFill>
               </a:rPr>
-              <a:t>0.9</a:t>
+              <a:t>0,9</a:t>
             </a:r>
           </a:p>
         </p:txBody>
@@ -21060,7 +21060,7 @@
             <a:pPr algn="ctr"/>
             <a:r>
               <a:rPr lang="en-GB" sz="8800" dirty="0"/>
-              <a:t>0.2 + 0.7</a:t>
+              <a:t>0,2 + 0,7</a:t>
             </a:r>
           </a:p>
         </p:txBody>
@@ -21348,7 +21348,7 @@
                   <a:schemeClr val="tx1"/>
                 </a:solidFill>
               </a:rPr>
-              <a:t>3.5</a:t>
+              <a:t>3,5</a:t>
             </a:r>
           </a:p>
         </p:txBody>
@@ -21384,7 +21384,7 @@
             <a:pPr algn="ctr"/>
             <a:r>
               <a:rPr lang="en-GB" sz="8800" dirty="0"/>
-              <a:t>1.4 + 2.1</a:t>
+              <a:t>1,4 + 2,1</a:t>
             </a:r>
           </a:p>
         </p:txBody>
@@ -21672,7 +21672,7 @@
                   <a:schemeClr val="tx1"/>
                 </a:solidFill>
               </a:rPr>
-              <a:t>3.9</a:t>
+              <a:t>3,9</a:t>
             </a:r>
           </a:p>
         </p:txBody>
@@ -21708,7 +21708,7 @@
             <a:pPr algn="ctr"/>
             <a:r>
               <a:rPr lang="en-GB" sz="8800" dirty="0"/>
-              <a:t>6 − 2.1</a:t>
+              <a:t>6 − 2,1</a:t>
             </a:r>
           </a:p>
         </p:txBody>
@@ -21996,7 +21996,7 @@
                   <a:schemeClr val="tx1"/>
                 </a:solidFill>
               </a:rPr>
-              <a:t>1.9</a:t>
+              <a:t>1,9</a:t>
             </a:r>
           </a:p>
         </p:txBody>
@@ -22032,7 +22032,7 @@
             <a:pPr algn="ctr"/>
             <a:r>
               <a:rPr lang="en-GB" sz="8800" dirty="0"/>
-              <a:t>2.7 − 0.8</a:t>
+              <a:t>2,7 − 0,8</a:t>
             </a:r>
           </a:p>
         </p:txBody>
@@ -22320,7 +22320,7 @@
                   <a:schemeClr val="tx1"/>
                 </a:solidFill>
               </a:rPr>
-              <a:t>2.4</a:t>
+              <a:t>2,4</a:t>
             </a:r>
           </a:p>
         </p:txBody>
@@ -22356,7 +22356,7 @@
             <a:pPr algn="ctr"/>
             <a:r>
               <a:rPr lang="en-GB" sz="8800" dirty="0"/>
-              <a:t>3 × 0.8</a:t>
+              <a:t>3 × 0,8</a:t>
             </a:r>
           </a:p>
         </p:txBody>
@@ -22644,7 +22644,7 @@
                   <a:schemeClr val="tx1"/>
                 </a:solidFill>
               </a:rPr>
-              <a:t>2.8</a:t>
+              <a:t>2,8</a:t>
             </a:r>
           </a:p>
         </p:txBody>
@@ -22680,7 +22680,7 @@
             <a:pPr algn="ctr"/>
             <a:r>
               <a:rPr lang="en-GB" sz="8800" dirty="0"/>
-              <a:t>0.7 × 4</a:t>
+              <a:t>0,7 × 4</a:t>
             </a:r>
           </a:p>
         </p:txBody>
